--- a/formation_pptx_test.pptx
+++ b/formation_pptx_test.pptx
@@ -261,7 +261,7 @@
           <a:p>
             <a:fld id="{47912B13-307C-461C-9EF5-D374B43372A3}" type="datetimeFigureOut">
               <a:rPr lang="en-US" smtClean="0"/>
-              <a:t>9/26/2025</a:t>
+              <a:t>9/27/2025</a:t>
             </a:fld>
             <a:endParaRPr lang="en-US"/>
           </a:p>
@@ -461,7 +461,7 @@
           <a:p>
             <a:fld id="{47912B13-307C-461C-9EF5-D374B43372A3}" type="datetimeFigureOut">
               <a:rPr lang="en-US" smtClean="0"/>
-              <a:t>9/26/2025</a:t>
+              <a:t>9/27/2025</a:t>
             </a:fld>
             <a:endParaRPr lang="en-US"/>
           </a:p>
@@ -671,7 +671,7 @@
           <a:p>
             <a:fld id="{47912B13-307C-461C-9EF5-D374B43372A3}" type="datetimeFigureOut">
               <a:rPr lang="en-US" smtClean="0"/>
-              <a:t>9/26/2025</a:t>
+              <a:t>9/27/2025</a:t>
             </a:fld>
             <a:endParaRPr lang="en-US"/>
           </a:p>
@@ -871,7 +871,7 @@
           <a:p>
             <a:fld id="{47912B13-307C-461C-9EF5-D374B43372A3}" type="datetimeFigureOut">
               <a:rPr lang="en-US" smtClean="0"/>
-              <a:t>9/26/2025</a:t>
+              <a:t>9/27/2025</a:t>
             </a:fld>
             <a:endParaRPr lang="en-US"/>
           </a:p>
@@ -1147,7 +1147,7 @@
           <a:p>
             <a:fld id="{47912B13-307C-461C-9EF5-D374B43372A3}" type="datetimeFigureOut">
               <a:rPr lang="en-US" smtClean="0"/>
-              <a:t>9/26/2025</a:t>
+              <a:t>9/27/2025</a:t>
             </a:fld>
             <a:endParaRPr lang="en-US"/>
           </a:p>
@@ -1415,7 +1415,7 @@
           <a:p>
             <a:fld id="{47912B13-307C-461C-9EF5-D374B43372A3}" type="datetimeFigureOut">
               <a:rPr lang="en-US" smtClean="0"/>
-              <a:t>9/26/2025</a:t>
+              <a:t>9/27/2025</a:t>
             </a:fld>
             <a:endParaRPr lang="en-US"/>
           </a:p>
@@ -1830,7 +1830,7 @@
           <a:p>
             <a:fld id="{47912B13-307C-461C-9EF5-D374B43372A3}" type="datetimeFigureOut">
               <a:rPr lang="en-US" smtClean="0"/>
-              <a:t>9/26/2025</a:t>
+              <a:t>9/27/2025</a:t>
             </a:fld>
             <a:endParaRPr lang="en-US"/>
           </a:p>
@@ -1972,7 +1972,7 @@
           <a:p>
             <a:fld id="{47912B13-307C-461C-9EF5-D374B43372A3}" type="datetimeFigureOut">
               <a:rPr lang="en-US" smtClean="0"/>
-              <a:t>9/26/2025</a:t>
+              <a:t>9/27/2025</a:t>
             </a:fld>
             <a:endParaRPr lang="en-US"/>
           </a:p>
@@ -2085,7 +2085,7 @@
           <a:p>
             <a:fld id="{47912B13-307C-461C-9EF5-D374B43372A3}" type="datetimeFigureOut">
               <a:rPr lang="en-US" smtClean="0"/>
-              <a:t>9/26/2025</a:t>
+              <a:t>9/27/2025</a:t>
             </a:fld>
             <a:endParaRPr lang="en-US"/>
           </a:p>
@@ -2398,7 +2398,7 @@
           <a:p>
             <a:fld id="{47912B13-307C-461C-9EF5-D374B43372A3}" type="datetimeFigureOut">
               <a:rPr lang="en-US" smtClean="0"/>
-              <a:t>9/26/2025</a:t>
+              <a:t>9/27/2025</a:t>
             </a:fld>
             <a:endParaRPr lang="en-US"/>
           </a:p>
@@ -2687,7 +2687,7 @@
           <a:p>
             <a:fld id="{47912B13-307C-461C-9EF5-D374B43372A3}" type="datetimeFigureOut">
               <a:rPr lang="en-US" smtClean="0"/>
-              <a:t>9/26/2025</a:t>
+              <a:t>9/27/2025</a:t>
             </a:fld>
             <a:endParaRPr lang="en-US"/>
           </a:p>
@@ -2930,7 +2930,7 @@
           <a:p>
             <a:fld id="{47912B13-307C-461C-9EF5-D374B43372A3}" type="datetimeFigureOut">
               <a:rPr lang="en-US" smtClean="0"/>
-              <a:t>9/26/2025</a:t>
+              <a:t>9/27/2025</a:t>
             </a:fld>
             <a:endParaRPr lang="en-US"/>
           </a:p>
@@ -3397,10 +3397,6 @@
           <a:bodyPr/>
           <a:lstStyle/>
           <a:p>
-            <a:r>
-              <a:rPr lang="fr-FR"/>
-              <a:t>Aaaaaaaabbbbaaaaaaa</a:t>
-            </a:r>
             <a:endParaRPr lang="fr-FR" dirty="0"/>
           </a:p>
           <a:p>

--- a/formation_pptx_test.pptx
+++ b/formation_pptx_test.pptx
@@ -315,7 +315,7 @@
           <a:p>
             <a:fld id="{D3ACB7CF-7CC3-4906-8885-5B8F8638C016}" type="slidenum">
               <a:rPr lang="en-US" smtClean="0"/>
-              <a:t>‹N°›</a:t>
+              <a:t>‹#›</a:t>
             </a:fld>
             <a:endParaRPr lang="en-US"/>
           </a:p>
@@ -515,7 +515,7 @@
           <a:p>
             <a:fld id="{D3ACB7CF-7CC3-4906-8885-5B8F8638C016}" type="slidenum">
               <a:rPr lang="en-US" smtClean="0"/>
-              <a:t>‹N°›</a:t>
+              <a:t>‹#›</a:t>
             </a:fld>
             <a:endParaRPr lang="en-US"/>
           </a:p>
@@ -725,7 +725,7 @@
           <a:p>
             <a:fld id="{D3ACB7CF-7CC3-4906-8885-5B8F8638C016}" type="slidenum">
               <a:rPr lang="en-US" smtClean="0"/>
-              <a:t>‹N°›</a:t>
+              <a:t>‹#›</a:t>
             </a:fld>
             <a:endParaRPr lang="en-US"/>
           </a:p>
@@ -925,7 +925,7 @@
           <a:p>
             <a:fld id="{D3ACB7CF-7CC3-4906-8885-5B8F8638C016}" type="slidenum">
               <a:rPr lang="en-US" smtClean="0"/>
-              <a:t>‹N°›</a:t>
+              <a:t>‹#›</a:t>
             </a:fld>
             <a:endParaRPr lang="en-US"/>
           </a:p>
@@ -1201,7 +1201,7 @@
           <a:p>
             <a:fld id="{D3ACB7CF-7CC3-4906-8885-5B8F8638C016}" type="slidenum">
               <a:rPr lang="en-US" smtClean="0"/>
-              <a:t>‹N°›</a:t>
+              <a:t>‹#›</a:t>
             </a:fld>
             <a:endParaRPr lang="en-US"/>
           </a:p>
@@ -1469,7 +1469,7 @@
           <a:p>
             <a:fld id="{D3ACB7CF-7CC3-4906-8885-5B8F8638C016}" type="slidenum">
               <a:rPr lang="en-US" smtClean="0"/>
-              <a:t>‹N°›</a:t>
+              <a:t>‹#›</a:t>
             </a:fld>
             <a:endParaRPr lang="en-US"/>
           </a:p>
@@ -1884,7 +1884,7 @@
           <a:p>
             <a:fld id="{D3ACB7CF-7CC3-4906-8885-5B8F8638C016}" type="slidenum">
               <a:rPr lang="en-US" smtClean="0"/>
-              <a:t>‹N°›</a:t>
+              <a:t>‹#›</a:t>
             </a:fld>
             <a:endParaRPr lang="en-US"/>
           </a:p>
@@ -2026,7 +2026,7 @@
           <a:p>
             <a:fld id="{D3ACB7CF-7CC3-4906-8885-5B8F8638C016}" type="slidenum">
               <a:rPr lang="en-US" smtClean="0"/>
-              <a:t>‹N°›</a:t>
+              <a:t>‹#›</a:t>
             </a:fld>
             <a:endParaRPr lang="en-US"/>
           </a:p>
@@ -2139,7 +2139,7 @@
           <a:p>
             <a:fld id="{D3ACB7CF-7CC3-4906-8885-5B8F8638C016}" type="slidenum">
               <a:rPr lang="en-US" smtClean="0"/>
-              <a:t>‹N°›</a:t>
+              <a:t>‹#›</a:t>
             </a:fld>
             <a:endParaRPr lang="en-US"/>
           </a:p>
@@ -2452,7 +2452,7 @@
           <a:p>
             <a:fld id="{D3ACB7CF-7CC3-4906-8885-5B8F8638C016}" type="slidenum">
               <a:rPr lang="en-US" smtClean="0"/>
-              <a:t>‹N°›</a:t>
+              <a:t>‹#›</a:t>
             </a:fld>
             <a:endParaRPr lang="en-US"/>
           </a:p>
@@ -2741,7 +2741,7 @@
           <a:p>
             <a:fld id="{D3ACB7CF-7CC3-4906-8885-5B8F8638C016}" type="slidenum">
               <a:rPr lang="en-US" smtClean="0"/>
-              <a:t>‹N°›</a:t>
+              <a:t>‹#›</a:t>
             </a:fld>
             <a:endParaRPr lang="en-US"/>
           </a:p>
@@ -3020,7 +3020,7 @@
           <a:p>
             <a:fld id="{D3ACB7CF-7CC3-4906-8885-5B8F8638C016}" type="slidenum">
               <a:rPr lang="en-US" smtClean="0"/>
-              <a:t>‹N°›</a:t>
+              <a:t>‹#›</a:t>
             </a:fld>
             <a:endParaRPr lang="en-US"/>
           </a:p>
@@ -3369,10 +3369,17 @@
           <a:lstStyle/>
           <a:p>
             <a:r>
-              <a:rPr lang="fr-FR"/>
+              <a:rPr lang="fr-FR" dirty="0"/>
               <a:t>AAAA</a:t>
             </a:r>
-            <a:endParaRPr lang="en-US"/>
+            <a:br>
+              <a:rPr lang="fr-FR" dirty="0"/>
+            </a:br>
+            <a:r>
+              <a:rPr lang="fr-FR"/>
+              <a:t>Helloooooo</a:t>
+            </a:r>
+            <a:endParaRPr lang="en-US" dirty="0"/>
           </a:p>
         </p:txBody>
       </p:sp>

--- a/formation_pptx_test.pptx
+++ b/formation_pptx_test.pptx
@@ -315,7 +315,7 @@
           <a:p>
             <a:fld id="{D3ACB7CF-7CC3-4906-8885-5B8F8638C016}" type="slidenum">
               <a:rPr lang="en-US" smtClean="0"/>
-              <a:t>‹#›</a:t>
+              <a:t>‹N°›</a:t>
             </a:fld>
             <a:endParaRPr lang="en-US"/>
           </a:p>
@@ -515,7 +515,7 @@
           <a:p>
             <a:fld id="{D3ACB7CF-7CC3-4906-8885-5B8F8638C016}" type="slidenum">
               <a:rPr lang="en-US" smtClean="0"/>
-              <a:t>‹#›</a:t>
+              <a:t>‹N°›</a:t>
             </a:fld>
             <a:endParaRPr lang="en-US"/>
           </a:p>
@@ -725,7 +725,7 @@
           <a:p>
             <a:fld id="{D3ACB7CF-7CC3-4906-8885-5B8F8638C016}" type="slidenum">
               <a:rPr lang="en-US" smtClean="0"/>
-              <a:t>‹#›</a:t>
+              <a:t>‹N°›</a:t>
             </a:fld>
             <a:endParaRPr lang="en-US"/>
           </a:p>
@@ -925,7 +925,7 @@
           <a:p>
             <a:fld id="{D3ACB7CF-7CC3-4906-8885-5B8F8638C016}" type="slidenum">
               <a:rPr lang="en-US" smtClean="0"/>
-              <a:t>‹#›</a:t>
+              <a:t>‹N°›</a:t>
             </a:fld>
             <a:endParaRPr lang="en-US"/>
           </a:p>
@@ -1201,7 +1201,7 @@
           <a:p>
             <a:fld id="{D3ACB7CF-7CC3-4906-8885-5B8F8638C016}" type="slidenum">
               <a:rPr lang="en-US" smtClean="0"/>
-              <a:t>‹#›</a:t>
+              <a:t>‹N°›</a:t>
             </a:fld>
             <a:endParaRPr lang="en-US"/>
           </a:p>
@@ -1469,7 +1469,7 @@
           <a:p>
             <a:fld id="{D3ACB7CF-7CC3-4906-8885-5B8F8638C016}" type="slidenum">
               <a:rPr lang="en-US" smtClean="0"/>
-              <a:t>‹#›</a:t>
+              <a:t>‹N°›</a:t>
             </a:fld>
             <a:endParaRPr lang="en-US"/>
           </a:p>
@@ -1884,7 +1884,7 @@
           <a:p>
             <a:fld id="{D3ACB7CF-7CC3-4906-8885-5B8F8638C016}" type="slidenum">
               <a:rPr lang="en-US" smtClean="0"/>
-              <a:t>‹#›</a:t>
+              <a:t>‹N°›</a:t>
             </a:fld>
             <a:endParaRPr lang="en-US"/>
           </a:p>
@@ -2026,7 +2026,7 @@
           <a:p>
             <a:fld id="{D3ACB7CF-7CC3-4906-8885-5B8F8638C016}" type="slidenum">
               <a:rPr lang="en-US" smtClean="0"/>
-              <a:t>‹#›</a:t>
+              <a:t>‹N°›</a:t>
             </a:fld>
             <a:endParaRPr lang="en-US"/>
           </a:p>
@@ -2139,7 +2139,7 @@
           <a:p>
             <a:fld id="{D3ACB7CF-7CC3-4906-8885-5B8F8638C016}" type="slidenum">
               <a:rPr lang="en-US" smtClean="0"/>
-              <a:t>‹#›</a:t>
+              <a:t>‹N°›</a:t>
             </a:fld>
             <a:endParaRPr lang="en-US"/>
           </a:p>
@@ -2452,7 +2452,7 @@
           <a:p>
             <a:fld id="{D3ACB7CF-7CC3-4906-8885-5B8F8638C016}" type="slidenum">
               <a:rPr lang="en-US" smtClean="0"/>
-              <a:t>‹#›</a:t>
+              <a:t>‹N°›</a:t>
             </a:fld>
             <a:endParaRPr lang="en-US"/>
           </a:p>
@@ -2741,7 +2741,7 @@
           <a:p>
             <a:fld id="{D3ACB7CF-7CC3-4906-8885-5B8F8638C016}" type="slidenum">
               <a:rPr lang="en-US" smtClean="0"/>
-              <a:t>‹#›</a:t>
+              <a:t>‹N°›</a:t>
             </a:fld>
             <a:endParaRPr lang="en-US"/>
           </a:p>
@@ -3020,7 +3020,7 @@
           <a:p>
             <a:fld id="{D3ACB7CF-7CC3-4906-8885-5B8F8638C016}" type="slidenum">
               <a:rPr lang="en-US" smtClean="0"/>
-              <a:t>‹#›</a:t>
+              <a:t>‹N°›</a:t>
             </a:fld>
             <a:endParaRPr lang="en-US"/>
           </a:p>
@@ -3365,7 +3365,9 @@
         </p:nvSpPr>
         <p:spPr/>
         <p:txBody>
-          <a:bodyPr/>
+          <a:bodyPr>
+            <a:normAutofit fontScale="90000"/>
+          </a:bodyPr>
           <a:lstStyle/>
           <a:p>
             <a:r>
@@ -3376,8 +3378,19 @@
               <a:rPr lang="fr-FR" dirty="0"/>
             </a:br>
             <a:r>
-              <a:rPr lang="fr-FR"/>
+              <a:rPr lang="fr-FR" dirty="0" err="1"/>
               <a:t>Helloooooo</a:t>
+            </a:r>
+            <a:br>
+              <a:rPr lang="fr-FR" dirty="0"/>
+            </a:br>
+            <a:r>
+              <a:rPr lang="fr-FR" dirty="0"/>
+              <a:t>Hello </a:t>
+            </a:r>
+            <a:r>
+              <a:rPr lang="fr-FR"/>
+              <a:t>les amis</a:t>
             </a:r>
             <a:endParaRPr lang="en-US" dirty="0"/>
           </a:p>
